--- a/courses/learn_clustering/module01-01-affinity-metrics/slides.pptx
+++ b/courses/learn_clustering/module01-01-affinity-metrics/slides.pptx
@@ -515,12 +515,6 @@
               <a:t>Before you merge cells or coarsen a netlist, you need a score that says these two should stay together. That score is affinity. In this module you’ll compare plain edge weight with shared-neighbor scoring on the same tiny graph—and watch who wants to merge first.</a:t>
             </a:r>
           </a:p>
-          <a:p/>
-          <a:p>
-            <a:r>
-              <a:t>&lt;!-- algorithm-walkthrough --&gt;</a:t>
-            </a:r>
-          </a:p>
         </p:txBody>
       </p:sp>
       <p:sp>
@@ -939,12 +933,6 @@
           <a:p>
             <a:r>
               <a:t>Affinity is the objective’s local preference: which cells belong together before global constraints. Bad affinity means bad merges, and harder refinement later.</a:t>
-            </a:r>
-          </a:p>
-          <a:p/>
-          <a:p>
-            <a:r>
-              <a:t>&lt;!-- /algorithm-walkthrough --&gt;</a:t>
             </a:r>
           </a:p>
         </p:txBody>
@@ -5859,7 +5847,7 @@
                 <a:spcPts val="2200"/>
               </a:lnSpc>
               <a:spcAft>
-                <a:spcPts val="600"/>
+                <a:spcPts val="400"/>
               </a:spcAft>
             </a:pPr>
             <a:r>
@@ -5878,7 +5866,7 @@
                 <a:spcPts val="2200"/>
               </a:lnSpc>
               <a:spcAft>
-                <a:spcPts val="600"/>
+                <a:spcPts val="400"/>
               </a:spcAft>
             </a:pPr>
             <a:r>
@@ -5897,7 +5885,7 @@
                 <a:spcPts val="2200"/>
               </a:lnSpc>
               <a:spcAft>
-                <a:spcPts val="600"/>
+                <a:spcPts val="400"/>
               </a:spcAft>
             </a:pPr>
             <a:r>
@@ -5916,7 +5904,7 @@
                 <a:spcPts val="2200"/>
               </a:lnSpc>
               <a:spcAft>
-                <a:spcPts val="600"/>
+                <a:spcPts val="400"/>
               </a:spcAft>
             </a:pPr>
             <a:r>
@@ -5935,7 +5923,7 @@
                 <a:spcPts val="2200"/>
               </a:lnSpc>
               <a:spcAft>
-                <a:spcPts val="600"/>
+                <a:spcPts val="400"/>
               </a:spcAft>
             </a:pPr>
             <a:r>
@@ -5954,7 +5942,7 @@
                 <a:spcPts val="2200"/>
               </a:lnSpc>
               <a:spcAft>
-                <a:spcPts val="600"/>
+                <a:spcPts val="400"/>
               </a:spcAft>
             </a:pPr>
             <a:r>
@@ -5973,7 +5961,7 @@
                 <a:spcPts val="2200"/>
               </a:lnSpc>
               <a:spcAft>
-                <a:spcPts val="600"/>
+                <a:spcPts val="400"/>
               </a:spcAft>
             </a:pPr>
             <a:r>
@@ -5992,7 +5980,7 @@
                 <a:spcPts val="2200"/>
               </a:lnSpc>
               <a:spcAft>
-                <a:spcPts val="600"/>
+                <a:spcPts val="400"/>
               </a:spcAft>
             </a:pPr>
             <a:r>
@@ -6011,26 +5999,7 @@
                 <a:spcPts val="2200"/>
               </a:lnSpc>
               <a:spcAft>
-                <a:spcPts val="600"/>
-              </a:spcAft>
-            </a:pPr>
-            <a:r>
-              <a:rPr sz="2000" b="0">
-                <a:solidFill>
-                  <a:srgbClr val="333333"/>
-                </a:solidFill>
-                <a:latin typeface="Consolas"/>
-              </a:rPr>
-              <a:t/>
-            </a:r>
-          </a:p>
-          <a:p>
-            <a:pPr>
-              <a:lnSpc>
-                <a:spcPts val="2200"/>
-              </a:lnSpc>
-              <a:spcAft>
-                <a:spcPts val="600"/>
+                <a:spcPts val="400"/>
               </a:spcAft>
             </a:pPr>
             <a:r>
